--- a/(7.6) 진행 대사 작업.pptx
+++ b/(7.6) 진행 대사 작업.pptx
@@ -11,10 +11,7 @@
     <p:sldId id="259" r:id="rId5"/>
     <p:sldId id="260" r:id="rId6"/>
     <p:sldId id="261" r:id="rId7"/>
-    <p:sldId id="263" r:id="rId8"/>
-    <p:sldId id="264" r:id="rId9"/>
-    <p:sldId id="262" r:id="rId10"/>
-    <p:sldId id="265" r:id="rId11"/>
+    <p:sldId id="265" r:id="rId8"/>
   </p:sldIdLst>
   <p:sldSz cx="12192000" cy="6858000"/>
   <p:notesSz cx="6858000" cy="9144000"/>
@@ -113,6 +110,11 @@
       </a:defRPr>
     </a:lvl9pPr>
   </p:defaultTextStyle>
+  <p:extLst>
+    <p:ext uri="{EFAFB233-063F-42B5-8137-9DF3F51BA10A}">
+      <p15:sldGuideLst xmlns:p15="http://schemas.microsoft.com/office/powerpoint/2012/main"/>
+    </p:ext>
+  </p:extLst>
 </p:presentation>
 </file>
 
@@ -128,8 +130,8 @@
 <pc:chgInfo xmlns:a="http://schemas.openxmlformats.org/drawingml/2006/main" xmlns:r="http://schemas.openxmlformats.org/officeDocument/2006/relationships" xmlns:ac="http://schemas.microsoft.com/office/drawing/2013/main/command" xmlns:pc="http://schemas.microsoft.com/office/powerpoint/2013/main/command">
   <pc:docChgLst>
     <pc:chgData name="musukie52@gmail.com" userId="017bd91f96aa8751" providerId="LiveId" clId="{5B2C3894-F97E-4CAB-8812-5BB4D83AAC6A}"/>
-    <pc:docChg chg="custSel addSld modSld">
-      <pc:chgData name="musukie52@gmail.com" userId="017bd91f96aa8751" providerId="LiveId" clId="{5B2C3894-F97E-4CAB-8812-5BB4D83AAC6A}" dt="2026-07-06T06:39:27.103" v="169" actId="20577"/>
+    <pc:docChg chg="custSel addSld delSld modSld">
+      <pc:chgData name="musukie52@gmail.com" userId="017bd91f96aa8751" providerId="LiveId" clId="{5B2C3894-F97E-4CAB-8812-5BB4D83AAC6A}" dt="2026-07-07T01:23:58.876" v="172" actId="47"/>
       <pc:docMkLst>
         <pc:docMk/>
       </pc:docMkLst>
@@ -263,22 +265,22 @@
           </ac:picMkLst>
         </pc:picChg>
       </pc:sldChg>
-      <pc:sldChg chg="add">
-        <pc:chgData name="musukie52@gmail.com" userId="017bd91f96aa8751" providerId="LiveId" clId="{5B2C3894-F97E-4CAB-8812-5BB4D83AAC6A}" dt="2026-07-06T06:35:29.867" v="14"/>
+      <pc:sldChg chg="add del">
+        <pc:chgData name="musukie52@gmail.com" userId="017bd91f96aa8751" providerId="LiveId" clId="{5B2C3894-F97E-4CAB-8812-5BB4D83AAC6A}" dt="2026-07-07T01:23:58.876" v="172" actId="47"/>
         <pc:sldMkLst>
           <pc:docMk/>
           <pc:sldMk cId="3165424088" sldId="262"/>
         </pc:sldMkLst>
       </pc:sldChg>
-      <pc:sldChg chg="add">
-        <pc:chgData name="musukie52@gmail.com" userId="017bd91f96aa8751" providerId="LiveId" clId="{5B2C3894-F97E-4CAB-8812-5BB4D83AAC6A}" dt="2026-07-06T06:37:14.352" v="22"/>
+      <pc:sldChg chg="add del">
+        <pc:chgData name="musukie52@gmail.com" userId="017bd91f96aa8751" providerId="LiveId" clId="{5B2C3894-F97E-4CAB-8812-5BB4D83AAC6A}" dt="2026-07-07T01:23:57.479" v="170" actId="47"/>
         <pc:sldMkLst>
           <pc:docMk/>
           <pc:sldMk cId="458269053" sldId="263"/>
         </pc:sldMkLst>
       </pc:sldChg>
-      <pc:sldChg chg="add">
-        <pc:chgData name="musukie52@gmail.com" userId="017bd91f96aa8751" providerId="LiveId" clId="{5B2C3894-F97E-4CAB-8812-5BB4D83AAC6A}" dt="2026-07-06T06:37:14.556" v="23"/>
+      <pc:sldChg chg="add del">
+        <pc:chgData name="musukie52@gmail.com" userId="017bd91f96aa8751" providerId="LiveId" clId="{5B2C3894-F97E-4CAB-8812-5BB4D83AAC6A}" dt="2026-07-07T01:23:58.159" v="171" actId="47"/>
         <pc:sldMkLst>
           <pc:docMk/>
           <pc:sldMk cId="2944328390" sldId="264"/>
@@ -459,7 +461,7 @@
           <a:p>
             <a:fld id="{BB636F51-E38D-4915-AF76-B19CF20FE7D5}" type="datetimeFigureOut">
               <a:rPr lang="ko-KR" altLang="en-US" smtClean="0"/>
-              <a:t>2026-07-06</a:t>
+              <a:t>2026-07-07</a:t>
             </a:fld>
             <a:endParaRPr lang="ko-KR" altLang="en-US"/>
           </a:p>
@@ -657,7 +659,7 @@
           <a:p>
             <a:fld id="{BB636F51-E38D-4915-AF76-B19CF20FE7D5}" type="datetimeFigureOut">
               <a:rPr lang="ko-KR" altLang="en-US" smtClean="0"/>
-              <a:t>2026-07-06</a:t>
+              <a:t>2026-07-07</a:t>
             </a:fld>
             <a:endParaRPr lang="ko-KR" altLang="en-US"/>
           </a:p>
@@ -865,7 +867,7 @@
           <a:p>
             <a:fld id="{BB636F51-E38D-4915-AF76-B19CF20FE7D5}" type="datetimeFigureOut">
               <a:rPr lang="ko-KR" altLang="en-US" smtClean="0"/>
-              <a:t>2026-07-06</a:t>
+              <a:t>2026-07-07</a:t>
             </a:fld>
             <a:endParaRPr lang="ko-KR" altLang="en-US"/>
           </a:p>
@@ -1063,7 +1065,7 @@
           <a:p>
             <a:fld id="{BB636F51-E38D-4915-AF76-B19CF20FE7D5}" type="datetimeFigureOut">
               <a:rPr lang="ko-KR" altLang="en-US" smtClean="0"/>
-              <a:t>2026-07-06</a:t>
+              <a:t>2026-07-07</a:t>
             </a:fld>
             <a:endParaRPr lang="ko-KR" altLang="en-US"/>
           </a:p>
@@ -1338,7 +1340,7 @@
           <a:p>
             <a:fld id="{BB636F51-E38D-4915-AF76-B19CF20FE7D5}" type="datetimeFigureOut">
               <a:rPr lang="ko-KR" altLang="en-US" smtClean="0"/>
-              <a:t>2026-07-06</a:t>
+              <a:t>2026-07-07</a:t>
             </a:fld>
             <a:endParaRPr lang="ko-KR" altLang="en-US"/>
           </a:p>
@@ -1603,7 +1605,7 @@
           <a:p>
             <a:fld id="{BB636F51-E38D-4915-AF76-B19CF20FE7D5}" type="datetimeFigureOut">
               <a:rPr lang="ko-KR" altLang="en-US" smtClean="0"/>
-              <a:t>2026-07-06</a:t>
+              <a:t>2026-07-07</a:t>
             </a:fld>
             <a:endParaRPr lang="ko-KR" altLang="en-US"/>
           </a:p>
@@ -2015,7 +2017,7 @@
           <a:p>
             <a:fld id="{BB636F51-E38D-4915-AF76-B19CF20FE7D5}" type="datetimeFigureOut">
               <a:rPr lang="ko-KR" altLang="en-US" smtClean="0"/>
-              <a:t>2026-07-06</a:t>
+              <a:t>2026-07-07</a:t>
             </a:fld>
             <a:endParaRPr lang="ko-KR" altLang="en-US"/>
           </a:p>
@@ -2156,7 +2158,7 @@
           <a:p>
             <a:fld id="{BB636F51-E38D-4915-AF76-B19CF20FE7D5}" type="datetimeFigureOut">
               <a:rPr lang="ko-KR" altLang="en-US" smtClean="0"/>
-              <a:t>2026-07-06</a:t>
+              <a:t>2026-07-07</a:t>
             </a:fld>
             <a:endParaRPr lang="ko-KR" altLang="en-US"/>
           </a:p>
@@ -2269,7 +2271,7 @@
           <a:p>
             <a:fld id="{BB636F51-E38D-4915-AF76-B19CF20FE7D5}" type="datetimeFigureOut">
               <a:rPr lang="ko-KR" altLang="en-US" smtClean="0"/>
-              <a:t>2026-07-06</a:t>
+              <a:t>2026-07-07</a:t>
             </a:fld>
             <a:endParaRPr lang="ko-KR" altLang="en-US"/>
           </a:p>
@@ -2580,7 +2582,7 @@
           <a:p>
             <a:fld id="{BB636F51-E38D-4915-AF76-B19CF20FE7D5}" type="datetimeFigureOut">
               <a:rPr lang="ko-KR" altLang="en-US" smtClean="0"/>
-              <a:t>2026-07-06</a:t>
+              <a:t>2026-07-07</a:t>
             </a:fld>
             <a:endParaRPr lang="ko-KR" altLang="en-US"/>
           </a:p>
@@ -2868,7 +2870,7 @@
           <a:p>
             <a:fld id="{BB636F51-E38D-4915-AF76-B19CF20FE7D5}" type="datetimeFigureOut">
               <a:rPr lang="ko-KR" altLang="en-US" smtClean="0"/>
-              <a:t>2026-07-06</a:t>
+              <a:t>2026-07-07</a:t>
             </a:fld>
             <a:endParaRPr lang="ko-KR" altLang="en-US"/>
           </a:p>
@@ -3109,7 +3111,7 @@
           <a:p>
             <a:fld id="{BB636F51-E38D-4915-AF76-B19CF20FE7D5}" type="datetimeFigureOut">
               <a:rPr lang="ko-KR" altLang="en-US" smtClean="0"/>
-              <a:t>2026-07-06</a:t>
+              <a:t>2026-07-07</a:t>
             </a:fld>
             <a:endParaRPr lang="ko-KR" altLang="en-US"/>
           </a:p>
@@ -3569,148 +3571,6 @@
 </p:sld>
 </file>
 
-<file path=ppt/slides/slide10.xml><?xml version="1.0" encoding="utf-8"?>
-<p:sld xmlns:a="http://schemas.openxmlformats.org/drawingml/2006/main" xmlns:r="http://schemas.openxmlformats.org/officeDocument/2006/relationships" xmlns:p="http://schemas.openxmlformats.org/presentationml/2006/main">
-  <p:cSld>
-    <p:spTree>
-      <p:nvGrpSpPr>
-        <p:cNvPr id="1" name=""/>
-        <p:cNvGrpSpPr/>
-        <p:nvPr/>
-      </p:nvGrpSpPr>
-      <p:grpSpPr>
-        <a:xfrm>
-          <a:off x="0" y="0"/>
-          <a:ext cx="0" cy="0"/>
-          <a:chOff x="0" y="0"/>
-          <a:chExt cx="0" cy="0"/>
-        </a:xfrm>
-      </p:grpSpPr>
-      <p:sp>
-        <p:nvSpPr>
-          <p:cNvPr id="2" name="제목 1">
-            <a:extLst>
-              <a:ext uri="{FF2B5EF4-FFF2-40B4-BE49-F238E27FC236}">
-                <a16:creationId xmlns:a16="http://schemas.microsoft.com/office/drawing/2014/main" id="{601649E2-2A56-8F6C-6280-4BAD39E9289A}"/>
-              </a:ext>
-            </a:extLst>
-          </p:cNvPr>
-          <p:cNvSpPr>
-            <a:spLocks noGrp="1"/>
-          </p:cNvSpPr>
-          <p:nvPr>
-            <p:ph type="title"/>
-          </p:nvPr>
-        </p:nvSpPr>
-        <p:spPr/>
-        <p:txBody>
-          <a:bodyPr/>
-          <a:lstStyle/>
-          <a:p>
-            <a:r>
-              <a:rPr lang="en-US" altLang="ko-KR" dirty="0"/>
-              <a:t>[</a:t>
-            </a:r>
-            <a:r>
-              <a:rPr lang="ko-KR" altLang="en-US" dirty="0"/>
-              <a:t>따라하기</a:t>
-            </a:r>
-            <a:r>
-              <a:rPr lang="en-US" altLang="ko-KR" dirty="0"/>
-              <a:t>] </a:t>
-            </a:r>
-            <a:r>
-              <a:rPr lang="ko-KR" altLang="en-US" dirty="0"/>
-              <a:t>내일 할 것</a:t>
-            </a:r>
-          </a:p>
-        </p:txBody>
-      </p:sp>
-      <p:sp>
-        <p:nvSpPr>
-          <p:cNvPr id="3" name="내용 개체 틀 2">
-            <a:extLst>
-              <a:ext uri="{FF2B5EF4-FFF2-40B4-BE49-F238E27FC236}">
-                <a16:creationId xmlns:a16="http://schemas.microsoft.com/office/drawing/2014/main" id="{D3B21505-0E72-37A3-5E89-158543565A92}"/>
-              </a:ext>
-            </a:extLst>
-          </p:cNvPr>
-          <p:cNvSpPr>
-            <a:spLocks noGrp="1"/>
-          </p:cNvSpPr>
-          <p:nvPr>
-            <p:ph idx="1"/>
-          </p:nvPr>
-        </p:nvSpPr>
-        <p:spPr/>
-        <p:txBody>
-          <a:bodyPr/>
-          <a:lstStyle/>
-          <a:p>
-            <a:pPr marL="0" indent="0">
-              <a:buNone/>
-            </a:pPr>
-            <a:r>
-              <a:rPr lang="en-US" altLang="ko-KR" b="1" dirty="0"/>
-              <a:t>[</a:t>
-            </a:r>
-            <a:r>
-              <a:rPr lang="ko-KR" altLang="en-US" b="1" dirty="0"/>
-              <a:t>퀘스트 설계 포트폴리오</a:t>
-            </a:r>
-            <a:r>
-              <a:rPr lang="en-US" altLang="ko-KR" b="1" dirty="0"/>
-              <a:t>]</a:t>
-            </a:r>
-          </a:p>
-          <a:p>
-            <a:pPr marL="514350" indent="-514350">
-              <a:buFont typeface="+mj-lt"/>
-              <a:buAutoNum type="arabicPeriod"/>
-            </a:pPr>
-            <a:r>
-              <a:rPr lang="ko-KR" altLang="en-US" dirty="0"/>
-              <a:t>달성하는 과정의 재미</a:t>
-            </a:r>
-            <a:endParaRPr lang="en-US" altLang="ko-KR" dirty="0"/>
-          </a:p>
-          <a:p>
-            <a:pPr marL="514350" indent="-514350">
-              <a:buFont typeface="+mj-lt"/>
-              <a:buAutoNum type="arabicPeriod"/>
-            </a:pPr>
-            <a:r>
-              <a:rPr lang="ko-KR" altLang="en-US" dirty="0"/>
-              <a:t>재미</a:t>
-            </a:r>
-            <a:endParaRPr lang="en-US" altLang="ko-KR" dirty="0"/>
-          </a:p>
-          <a:p>
-            <a:pPr marL="514350" indent="-514350">
-              <a:buFont typeface="+mj-lt"/>
-              <a:buAutoNum type="arabicPeriod"/>
-            </a:pPr>
-            <a:r>
-              <a:rPr lang="ko-KR" altLang="en-US"/>
-              <a:t>재미</a:t>
-            </a:r>
-            <a:endParaRPr lang="ko-KR" altLang="en-US" dirty="0"/>
-          </a:p>
-        </p:txBody>
-      </p:sp>
-    </p:spTree>
-    <p:extLst>
-      <p:ext uri="{BB962C8B-B14F-4D97-AF65-F5344CB8AC3E}">
-        <p14:creationId xmlns:p14="http://schemas.microsoft.com/office/powerpoint/2010/main" val="1239092491"/>
-      </p:ext>
-    </p:extLst>
-  </p:cSld>
-  <p:clrMapOvr>
-    <a:masterClrMapping/>
-  </p:clrMapOvr>
-</p:sld>
-</file>
-
 <file path=ppt/slides/slide2.xml><?xml version="1.0" encoding="utf-8"?>
 <p:sld xmlns:a="http://schemas.openxmlformats.org/drawingml/2006/main" xmlns:r="http://schemas.openxmlformats.org/officeDocument/2006/relationships" xmlns:p="http://schemas.openxmlformats.org/presentationml/2006/main">
   <p:cSld>
@@ -4040,13 +3900,7 @@
   <p:cSld>
     <p:spTree>
       <p:nvGrpSpPr>
-        <p:cNvPr id="1" name="">
-          <a:extLst>
-            <a:ext uri="{FF2B5EF4-FFF2-40B4-BE49-F238E27FC236}">
-              <a16:creationId xmlns:a16="http://schemas.microsoft.com/office/drawing/2014/main" id="{87895FCE-A968-BF93-B27A-3D4E7459BC31}"/>
-            </a:ext>
-          </a:extLst>
-        </p:cNvPr>
+        <p:cNvPr id="1" name=""/>
         <p:cNvGrpSpPr/>
         <p:nvPr/>
       </p:nvGrpSpPr>
@@ -4058,82 +3912,122 @@
           <a:chExt cx="0" cy="0"/>
         </a:xfrm>
       </p:grpSpPr>
+      <p:sp>
+        <p:nvSpPr>
+          <p:cNvPr id="2" name="제목 1">
+            <a:extLst>
+              <a:ext uri="{FF2B5EF4-FFF2-40B4-BE49-F238E27FC236}">
+                <a16:creationId xmlns:a16="http://schemas.microsoft.com/office/drawing/2014/main" id="{601649E2-2A56-8F6C-6280-4BAD39E9289A}"/>
+              </a:ext>
+            </a:extLst>
+          </p:cNvPr>
+          <p:cNvSpPr>
+            <a:spLocks noGrp="1"/>
+          </p:cNvSpPr>
+          <p:nvPr>
+            <p:ph type="title"/>
+          </p:nvPr>
+        </p:nvSpPr>
+        <p:spPr/>
+        <p:txBody>
+          <a:bodyPr/>
+          <a:lstStyle/>
+          <a:p>
+            <a:r>
+              <a:rPr lang="en-US" altLang="ko-KR" dirty="0"/>
+              <a:t>[</a:t>
+            </a:r>
+            <a:r>
+              <a:rPr lang="ko-KR" altLang="en-US" dirty="0"/>
+              <a:t>따라하기</a:t>
+            </a:r>
+            <a:r>
+              <a:rPr lang="en-US" altLang="ko-KR" dirty="0"/>
+              <a:t>] </a:t>
+            </a:r>
+            <a:r>
+              <a:rPr lang="ko-KR" altLang="en-US" dirty="0"/>
+              <a:t>내일 할 것</a:t>
+            </a:r>
+          </a:p>
+        </p:txBody>
+      </p:sp>
+      <p:sp>
+        <p:nvSpPr>
+          <p:cNvPr id="3" name="내용 개체 틀 2">
+            <a:extLst>
+              <a:ext uri="{FF2B5EF4-FFF2-40B4-BE49-F238E27FC236}">
+                <a16:creationId xmlns:a16="http://schemas.microsoft.com/office/drawing/2014/main" id="{D3B21505-0E72-37A3-5E89-158543565A92}"/>
+              </a:ext>
+            </a:extLst>
+          </p:cNvPr>
+          <p:cNvSpPr>
+            <a:spLocks noGrp="1"/>
+          </p:cNvSpPr>
+          <p:nvPr>
+            <p:ph idx="1"/>
+          </p:nvPr>
+        </p:nvSpPr>
+        <p:spPr/>
+        <p:txBody>
+          <a:bodyPr/>
+          <a:lstStyle/>
+          <a:p>
+            <a:pPr marL="0" indent="0">
+              <a:buNone/>
+            </a:pPr>
+            <a:r>
+              <a:rPr lang="en-US" altLang="ko-KR" b="1" dirty="0"/>
+              <a:t>[</a:t>
+            </a:r>
+            <a:r>
+              <a:rPr lang="ko-KR" altLang="en-US" b="1" dirty="0"/>
+              <a:t>퀘스트 설계 포트폴리오</a:t>
+            </a:r>
+            <a:r>
+              <a:rPr lang="en-US" altLang="ko-KR" b="1" dirty="0"/>
+              <a:t>]</a:t>
+            </a:r>
+          </a:p>
+          <a:p>
+            <a:pPr marL="514350" indent="-514350">
+              <a:buFont typeface="+mj-lt"/>
+              <a:buAutoNum type="arabicPeriod"/>
+            </a:pPr>
+            <a:r>
+              <a:rPr lang="ko-KR" altLang="en-US" dirty="0"/>
+              <a:t>달성하는 과정의 재미</a:t>
+            </a:r>
+            <a:endParaRPr lang="en-US" altLang="ko-KR" dirty="0"/>
+          </a:p>
+          <a:p>
+            <a:pPr marL="514350" indent="-514350">
+              <a:buFont typeface="+mj-lt"/>
+              <a:buAutoNum type="arabicPeriod"/>
+            </a:pPr>
+            <a:r>
+              <a:rPr lang="ko-KR" altLang="en-US" dirty="0"/>
+              <a:t>재미</a:t>
+            </a:r>
+            <a:endParaRPr lang="en-US" altLang="ko-KR" dirty="0"/>
+          </a:p>
+          <a:p>
+            <a:pPr marL="514350" indent="-514350">
+              <a:buFont typeface="+mj-lt"/>
+              <a:buAutoNum type="arabicPeriod"/>
+            </a:pPr>
+            <a:r>
+              <a:rPr lang="ko-KR" altLang="en-US"/>
+              <a:t>재미</a:t>
+            </a:r>
+            <a:endParaRPr lang="ko-KR" altLang="en-US" dirty="0"/>
+          </a:p>
+        </p:txBody>
+      </p:sp>
     </p:spTree>
     <p:extLst>
       <p:ext uri="{BB962C8B-B14F-4D97-AF65-F5344CB8AC3E}">
-        <p14:creationId xmlns:p14="http://schemas.microsoft.com/office/powerpoint/2010/main" val="458269053"/>
-      </p:ext>
-    </p:extLst>
-  </p:cSld>
-  <p:clrMapOvr>
-    <a:masterClrMapping/>
-  </p:clrMapOvr>
-</p:sld>
-</file>
-
-<file path=ppt/slides/slide8.xml><?xml version="1.0" encoding="utf-8"?>
-<p:sld xmlns:a="http://schemas.openxmlformats.org/drawingml/2006/main" xmlns:r="http://schemas.openxmlformats.org/officeDocument/2006/relationships" xmlns:p="http://schemas.openxmlformats.org/presentationml/2006/main">
-  <p:cSld>
-    <p:spTree>
-      <p:nvGrpSpPr>
-        <p:cNvPr id="1" name="">
-          <a:extLst>
-            <a:ext uri="{FF2B5EF4-FFF2-40B4-BE49-F238E27FC236}">
-              <a16:creationId xmlns:a16="http://schemas.microsoft.com/office/drawing/2014/main" id="{0B80AAC3-7281-1BD0-F4C7-FAB77DFF6D48}"/>
-            </a:ext>
-          </a:extLst>
-        </p:cNvPr>
-        <p:cNvGrpSpPr/>
-        <p:nvPr/>
-      </p:nvGrpSpPr>
-      <p:grpSpPr>
-        <a:xfrm>
-          <a:off x="0" y="0"/>
-          <a:ext cx="0" cy="0"/>
-          <a:chOff x="0" y="0"/>
-          <a:chExt cx="0" cy="0"/>
-        </a:xfrm>
-      </p:grpSpPr>
-    </p:spTree>
-    <p:extLst>
-      <p:ext uri="{BB962C8B-B14F-4D97-AF65-F5344CB8AC3E}">
-        <p14:creationId xmlns:p14="http://schemas.microsoft.com/office/powerpoint/2010/main" val="2944328390"/>
-      </p:ext>
-    </p:extLst>
-  </p:cSld>
-  <p:clrMapOvr>
-    <a:masterClrMapping/>
-  </p:clrMapOvr>
-</p:sld>
-</file>
-
-<file path=ppt/slides/slide9.xml><?xml version="1.0" encoding="utf-8"?>
-<p:sld xmlns:a="http://schemas.openxmlformats.org/drawingml/2006/main" xmlns:r="http://schemas.openxmlformats.org/officeDocument/2006/relationships" xmlns:p="http://schemas.openxmlformats.org/presentationml/2006/main">
-  <p:cSld>
-    <p:spTree>
-      <p:nvGrpSpPr>
-        <p:cNvPr id="1" name="">
-          <a:extLst>
-            <a:ext uri="{FF2B5EF4-FFF2-40B4-BE49-F238E27FC236}">
-              <a16:creationId xmlns:a16="http://schemas.microsoft.com/office/drawing/2014/main" id="{E31D6C13-3866-3532-A66F-0251D77B55A4}"/>
-            </a:ext>
-          </a:extLst>
-        </p:cNvPr>
-        <p:cNvGrpSpPr/>
-        <p:nvPr/>
-      </p:nvGrpSpPr>
-      <p:grpSpPr>
-        <a:xfrm>
-          <a:off x="0" y="0"/>
-          <a:ext cx="0" cy="0"/>
-          <a:chOff x="0" y="0"/>
-          <a:chExt cx="0" cy="0"/>
-        </a:xfrm>
-      </p:grpSpPr>
-    </p:spTree>
-    <p:extLst>
-      <p:ext uri="{BB962C8B-B14F-4D97-AF65-F5344CB8AC3E}">
-        <p14:creationId xmlns:p14="http://schemas.microsoft.com/office/powerpoint/2010/main" val="3165424088"/>
+        <p14:creationId xmlns:p14="http://schemas.microsoft.com/office/powerpoint/2010/main" val="1239092491"/>
       </p:ext>
     </p:extLst>
   </p:cSld>
